--- a/Seasonal_Agriculture_Performance_Presentation.pptx
+++ b/Seasonal_Agriculture_Performance_Presentation.pptx
@@ -12205,36 +12205,6 @@
           </a:prstGeom>
         </p:spPr>
       </p:pic>
-      <p:pic>
-        <p:nvPicPr>
-          <p:cNvPr id="9" name="Picture 8" descr="25_69.png">
-            <a:extLst>
-              <a:ext uri="{FF2B5EF4-FFF2-40B4-BE49-F238E27FC236}">
-                <a16:creationId xmlns:a16="http://schemas.microsoft.com/office/drawing/2014/main" id="{C7840ED7-E3F9-2761-C3E1-9E287D6C77F4}"/>
-              </a:ext>
-            </a:extLst>
-          </p:cNvPr>
-          <p:cNvPicPr>
-            <a:picLocks noChangeAspect="1"/>
-          </p:cNvPicPr>
-          <p:nvPr/>
-        </p:nvPicPr>
-        <p:blipFill>
-          <a:blip r:embed="rId4"/>
-          <a:stretch>
-            <a:fillRect/>
-          </a:stretch>
-        </p:blipFill>
-        <p:spPr>
-          <a:xfrm>
-            <a:off x="6049098" y="2351184"/>
-            <a:ext cx="5700000" cy="3331985"/>
-          </a:xfrm>
-          <a:prstGeom prst="rect">
-            <a:avLst/>
-          </a:prstGeom>
-        </p:spPr>
-      </p:pic>
       <p:sp>
         <p:nvSpPr>
           <p:cNvPr id="11" name="Text Placeholder 1">
@@ -12495,13 +12465,43 @@
               <a:buNone/>
             </a:pPr>
             <a:r>
-              <a:rPr lang="en-US" sz="1400"/>
+              <a:rPr lang="en-US" sz="1400" dirty="0"/>
               <a:t>Punjab &amp; Maharashtra lead on profit; Drip irrigation gives the best yield and water efficiency of all methods.</a:t>
             </a:r>
             <a:endParaRPr lang="en-IN" dirty="0"/>
           </a:p>
         </p:txBody>
       </p:sp>
+      <p:pic>
+        <p:nvPicPr>
+          <p:cNvPr id="13" name="Picture 12">
+            <a:extLst>
+              <a:ext uri="{FF2B5EF4-FFF2-40B4-BE49-F238E27FC236}">
+                <a16:creationId xmlns:a16="http://schemas.microsoft.com/office/drawing/2014/main" id="{0D3054E7-7D92-2FF1-C950-09628CD6596F}"/>
+              </a:ext>
+            </a:extLst>
+          </p:cNvPr>
+          <p:cNvPicPr>
+            <a:picLocks noChangeAspect="1"/>
+          </p:cNvPicPr>
+          <p:nvPr/>
+        </p:nvPicPr>
+        <p:blipFill>
+          <a:blip r:embed="rId4"/>
+          <a:stretch>
+            <a:fillRect/>
+          </a:stretch>
+        </p:blipFill>
+        <p:spPr>
+          <a:xfrm>
+            <a:off x="6142904" y="2441381"/>
+            <a:ext cx="4982296" cy="3568481"/>
+          </a:xfrm>
+          <a:prstGeom prst="rect">
+            <a:avLst/>
+          </a:prstGeom>
+        </p:spPr>
+      </p:pic>
     </p:spTree>
     <p:extLst>
       <p:ext uri="{BB962C8B-B14F-4D97-AF65-F5344CB8AC3E}">
@@ -27252,36 +27252,6 @@
           </a:prstGeom>
         </p:spPr>
       </p:pic>
-      <p:pic>
-        <p:nvPicPr>
-          <p:cNvPr id="9" name="Picture 8" descr="23_61.png">
-            <a:extLst>
-              <a:ext uri="{FF2B5EF4-FFF2-40B4-BE49-F238E27FC236}">
-                <a16:creationId xmlns:a16="http://schemas.microsoft.com/office/drawing/2014/main" id="{70B537CA-0EFD-4A24-85FF-13F852378D8F}"/>
-              </a:ext>
-            </a:extLst>
-          </p:cNvPr>
-          <p:cNvPicPr>
-            <a:picLocks noChangeAspect="1"/>
-          </p:cNvPicPr>
-          <p:nvPr/>
-        </p:nvPicPr>
-        <p:blipFill>
-          <a:blip r:embed="rId4"/>
-          <a:stretch>
-            <a:fillRect/>
-          </a:stretch>
-        </p:blipFill>
-        <p:spPr>
-          <a:xfrm>
-            <a:off x="6428638" y="2360099"/>
-            <a:ext cx="5073626" cy="4050000"/>
-          </a:xfrm>
-          <a:prstGeom prst="rect">
-            <a:avLst/>
-          </a:prstGeom>
-        </p:spPr>
-      </p:pic>
       <p:sp>
         <p:nvSpPr>
           <p:cNvPr id="11" name="TextBox 10">
@@ -27321,6 +27291,36 @@
           </a:p>
         </p:txBody>
       </p:sp>
+      <p:pic>
+        <p:nvPicPr>
+          <p:cNvPr id="13" name="Picture 12">
+            <a:extLst>
+              <a:ext uri="{FF2B5EF4-FFF2-40B4-BE49-F238E27FC236}">
+                <a16:creationId xmlns:a16="http://schemas.microsoft.com/office/drawing/2014/main" id="{90081E4C-676E-54BC-F24A-D5B2F3470F5E}"/>
+              </a:ext>
+            </a:extLst>
+          </p:cNvPr>
+          <p:cNvPicPr>
+            <a:picLocks noChangeAspect="1"/>
+          </p:cNvPicPr>
+          <p:nvPr/>
+        </p:nvPicPr>
+        <p:blipFill>
+          <a:blip r:embed="rId4"/>
+          <a:stretch>
+            <a:fillRect/>
+          </a:stretch>
+        </p:blipFill>
+        <p:spPr>
+          <a:xfrm>
+            <a:off x="6110871" y="2377440"/>
+            <a:ext cx="5820293" cy="4094480"/>
+          </a:xfrm>
+          <a:prstGeom prst="rect">
+            <a:avLst/>
+          </a:prstGeom>
+        </p:spPr>
+      </p:pic>
     </p:spTree>
     <p:extLst>
       <p:ext uri="{BB962C8B-B14F-4D97-AF65-F5344CB8AC3E}">
@@ -28850,21 +28850,21 @@
 </file>
 
 <file path=customXml/item1.xml><?xml version="1.0" encoding="utf-8"?>
+<?mso-contentType ?>
+<FormTemplates xmlns="http://schemas.microsoft.com/sharepoint/v3/contenttype/forms">
+  <Display>DocumentLibraryForm</Display>
+  <Edit>DocumentLibraryForm</Edit>
+  <New>DocumentLibraryForm</New>
+</FormTemplates>
+</file>
+
+<file path=customXml/item2.xml><?xml version="1.0" encoding="utf-8"?>
 <p:properties xmlns:p="http://schemas.microsoft.com/office/2006/metadata/properties" xmlns:xsi="http://www.w3.org/2001/XMLSchema-instance" xmlns:pc="http://schemas.microsoft.com/office/infopath/2007/PartnerControls">
   <documentManagement>
     <Status xmlns="71af3243-3dd4-4a8d-8c0d-dd76da1f02a5">Not started</Status>
     <MediaServiceKeyPoints xmlns="71af3243-3dd4-4a8d-8c0d-dd76da1f02a5" xsi:nil="true"/>
   </documentManagement>
 </p:properties>
-</file>
-
-<file path=customXml/item2.xml><?xml version="1.0" encoding="utf-8"?>
-<?mso-contentType ?>
-<FormTemplates xmlns="http://schemas.microsoft.com/sharepoint/v3/contenttype/forms">
-  <Display>DocumentLibraryForm</Display>
-  <Edit>DocumentLibraryForm</Edit>
-  <New>DocumentLibraryForm</New>
-</FormTemplates>
 </file>
 
 <file path=customXml/item3.xml><?xml version="1.0" encoding="utf-8"?>
@@ -29089,19 +29089,19 @@
 </file>
 
 <file path=customXml/itemProps1.xml><?xml version="1.0" encoding="utf-8"?>
+<ds:datastoreItem xmlns:ds="http://schemas.openxmlformats.org/officeDocument/2006/customXml" ds:itemID="{05D99ABA-76CE-4A8E-B5F0-C051B96628DE}">
+  <ds:schemaRefs>
+    <ds:schemaRef ds:uri="http://schemas.microsoft.com/sharepoint/v3/contenttype/forms"/>
+  </ds:schemaRefs>
+</ds:datastoreItem>
+</file>
+
+<file path=customXml/itemProps2.xml><?xml version="1.0" encoding="utf-8"?>
 <ds:datastoreItem xmlns:ds="http://schemas.openxmlformats.org/officeDocument/2006/customXml" ds:itemID="{4DEA9014-ED64-4558-B1E1-D03F0EE32BEB}">
   <ds:schemaRefs>
     <ds:schemaRef ds:uri="http://schemas.microsoft.com/office/2006/metadata/properties"/>
     <ds:schemaRef ds:uri="http://schemas.microsoft.com/office/infopath/2007/PartnerControls"/>
     <ds:schemaRef ds:uri="71af3243-3dd4-4a8d-8c0d-dd76da1f02a5"/>
-  </ds:schemaRefs>
-</ds:datastoreItem>
-</file>
-
-<file path=customXml/itemProps2.xml><?xml version="1.0" encoding="utf-8"?>
-<ds:datastoreItem xmlns:ds="http://schemas.openxmlformats.org/officeDocument/2006/customXml" ds:itemID="{05D99ABA-76CE-4A8E-B5F0-C051B96628DE}">
-  <ds:schemaRefs>
-    <ds:schemaRef ds:uri="http://schemas.microsoft.com/sharepoint/v3/contenttype/forms"/>
   </ds:schemaRefs>
 </ds:datastoreItem>
 </file>

--- a/Seasonal_Agriculture_Performance_Presentation.pptx
+++ b/Seasonal_Agriculture_Performance_Presentation.pptx
@@ -12221,8 +12221,8 @@
         </p:nvSpPr>
         <p:spPr>
           <a:xfrm>
-            <a:off x="807164" y="1873664"/>
-            <a:ext cx="4275138" cy="477520"/>
+            <a:off x="807163" y="1873664"/>
+            <a:ext cx="5846185" cy="509756"/>
           </a:xfrm>
           <a:prstGeom prst="rect">
             <a:avLst/>
@@ -12230,7 +12230,7 @@
         </p:spPr>
         <p:txBody>
           <a:bodyPr vert="horz" wrap="square" lIns="91440" tIns="45720" rIns="91440" bIns="45720" rtlCol="0">
-            <a:normAutofit fontScale="85000" lnSpcReduction="10000"/>
+            <a:normAutofit fontScale="92500"/>
           </a:bodyPr>
           <a:lstStyle>
             <a:lvl1pPr marL="342900" indent="-342900" algn="l" defTabSz="457200" rtl="0" eaLnBrk="1" latinLnBrk="0" hangingPunct="1">
@@ -12461,12 +12461,11 @@
           </a:lstStyle>
           <a:p>
             <a:pPr marL="0" indent="0">
-              <a:buFont typeface="Wingdings" panose="05000000000000000000" pitchFamily="2" charset="2"/>
               <a:buNone/>
             </a:pPr>
             <a:r>
               <a:rPr lang="en-US" sz="1400" dirty="0"/>
-              <a:t>Punjab &amp; Maharashtra lead on profit; Drip irrigation gives the best yield and water efficiency of all methods.</a:t>
+              <a:t>Punjab &amp; Maharashtra lead on profit; Drip irrigation gives the highest yield; Rainfed is the most water-efficient because it uses the least water.</a:t>
             </a:r>
             <a:endParaRPr lang="en-IN" dirty="0"/>
           </a:p>
@@ -13954,8 +13953,17 @@
           <a:p>
             <a:r>
               <a:rPr sz="1800" dirty="0"/>
-              <a:t>•  Apply statistical significance testing (ANOVA / t-tests) to confirm whether the seasonal and irrigation-method differences found here are significant, not just descriptive.</a:t>
+              <a:t>•  Apply statistical </a:t>
             </a:r>
+            <a:r>
+              <a:rPr lang="en-US" sz="1800" dirty="0"/>
+              <a:t>and e</a:t>
+            </a:r>
+            <a:r>
+              <a:rPr lang="en-US" dirty="0"/>
+              <a:t>xtend the significance testing (Kruskal-Wallis done here) to a model that controls for crop, irrigation and state together</a:t>
+            </a:r>
+            <a:endParaRPr sz="1800" dirty="0"/>
           </a:p>
           <a:p>
             <a:r>
@@ -27282,7 +27290,7 @@
           <a:p>
             <a:r>
               <a:rPr lang="en-US" sz="1400" dirty="0"/>
-              <a:t>Sugarcane's yield dwarfs all other crops in every season; Water Efficiency correlates most strongly with Yield (r=0.91).</a:t>
+              <a:t>Sugarcane's yield dwarfs all other crops in every season; Water Efficiency correlates most strongly with Yield (r=0.92).</a:t>
             </a:r>
             <a:endParaRPr lang="en-IN" sz="1400" dirty="0"/>
           </a:p>
@@ -28850,24 +28858,6 @@
 </file>
 
 <file path=customXml/item1.xml><?xml version="1.0" encoding="utf-8"?>
-<?mso-contentType ?>
-<FormTemplates xmlns="http://schemas.microsoft.com/sharepoint/v3/contenttype/forms">
-  <Display>DocumentLibraryForm</Display>
-  <Edit>DocumentLibraryForm</Edit>
-  <New>DocumentLibraryForm</New>
-</FormTemplates>
-</file>
-
-<file path=customXml/item2.xml><?xml version="1.0" encoding="utf-8"?>
-<p:properties xmlns:p="http://schemas.microsoft.com/office/2006/metadata/properties" xmlns:xsi="http://www.w3.org/2001/XMLSchema-instance" xmlns:pc="http://schemas.microsoft.com/office/infopath/2007/PartnerControls">
-  <documentManagement>
-    <Status xmlns="71af3243-3dd4-4a8d-8c0d-dd76da1f02a5">Not started</Status>
-    <MediaServiceKeyPoints xmlns="71af3243-3dd4-4a8d-8c0d-dd76da1f02a5" xsi:nil="true"/>
-  </documentManagement>
-</p:properties>
-</file>
-
-<file path=customXml/item3.xml><?xml version="1.0" encoding="utf-8"?>
 <ct:contentTypeSchema xmlns:ct="http://schemas.microsoft.com/office/2006/metadata/contentType" xmlns:ma="http://schemas.microsoft.com/office/2006/metadata/properties/metaAttributes" ct:_="" ma:_="" ma:contentTypeName="Document" ma:contentTypeID="0x01010079F111ED35F8CC479449609E8A0923A6" ma:contentTypeVersion="12" ma:contentTypeDescription="Create a new document." ma:contentTypeScope="" ma:versionID="426e97fa315356fffbdcd9876fe988c2">
   <xsd:schema xmlns:xsd="http://www.w3.org/2001/XMLSchema" xmlns:xs="http://www.w3.org/2001/XMLSchema" xmlns:p="http://schemas.microsoft.com/office/2006/metadata/properties" xmlns:ns2="71af3243-3dd4-4a8d-8c0d-dd76da1f02a5" xmlns:ns3="16c05727-aa75-4e4a-9b5f-8a80a1165891" targetNamespace="http://schemas.microsoft.com/office/2006/metadata/properties" ma:root="true" ma:fieldsID="14b8f0def80e6d70ce3def20c90759ae" ns2:_="" ns3:_="">
     <xsd:import namespace="71af3243-3dd4-4a8d-8c0d-dd76da1f02a5"/>
@@ -29088,25 +29078,25 @@
 </ct:contentTypeSchema>
 </file>
 
-<file path=customXml/itemProps1.xml><?xml version="1.0" encoding="utf-8"?>
-<ds:datastoreItem xmlns:ds="http://schemas.openxmlformats.org/officeDocument/2006/customXml" ds:itemID="{05D99ABA-76CE-4A8E-B5F0-C051B96628DE}">
-  <ds:schemaRefs>
-    <ds:schemaRef ds:uri="http://schemas.microsoft.com/sharepoint/v3/contenttype/forms"/>
-  </ds:schemaRefs>
-</ds:datastoreItem>
+<file path=customXml/item2.xml><?xml version="1.0" encoding="utf-8"?>
+<p:properties xmlns:p="http://schemas.microsoft.com/office/2006/metadata/properties" xmlns:xsi="http://www.w3.org/2001/XMLSchema-instance" xmlns:pc="http://schemas.microsoft.com/office/infopath/2007/PartnerControls">
+  <documentManagement>
+    <Status xmlns="71af3243-3dd4-4a8d-8c0d-dd76da1f02a5">Not started</Status>
+    <MediaServiceKeyPoints xmlns="71af3243-3dd4-4a8d-8c0d-dd76da1f02a5" xsi:nil="true"/>
+  </documentManagement>
+</p:properties>
 </file>
 
-<file path=customXml/itemProps2.xml><?xml version="1.0" encoding="utf-8"?>
-<ds:datastoreItem xmlns:ds="http://schemas.openxmlformats.org/officeDocument/2006/customXml" ds:itemID="{4DEA9014-ED64-4558-B1E1-D03F0EE32BEB}">
-  <ds:schemaRefs>
-    <ds:schemaRef ds:uri="http://schemas.microsoft.com/office/2006/metadata/properties"/>
-    <ds:schemaRef ds:uri="http://schemas.microsoft.com/office/infopath/2007/PartnerControls"/>
-    <ds:schemaRef ds:uri="71af3243-3dd4-4a8d-8c0d-dd76da1f02a5"/>
-  </ds:schemaRefs>
-</ds:datastoreItem>
+<file path=customXml/item3.xml><?xml version="1.0" encoding="utf-8"?>
+<?mso-contentType ?>
+<FormTemplates xmlns="http://schemas.microsoft.com/sharepoint/v3/contenttype/forms">
+  <Display>DocumentLibraryForm</Display>
+  <Edit>DocumentLibraryForm</Edit>
+  <New>DocumentLibraryForm</New>
+</FormTemplates>
 </file>
 
-<file path=customXml/itemProps3.xml><?xml version="1.0" encoding="utf-8"?>
+<file path=customXml/itemProps1.xml><?xml version="1.0" encoding="utf-8"?>
 <ds:datastoreItem xmlns:ds="http://schemas.openxmlformats.org/officeDocument/2006/customXml" ds:itemID="{B19EB750-A6DA-4BE8-B87B-FC499FE73360}">
   <ds:schemaRefs>
     <ds:schemaRef ds:uri="http://schemas.microsoft.com/office/2006/metadata/contentType"/>
@@ -29123,4 +29113,22 @@
     <ds:schemaRef ds:uri="http://schemas.microsoft.com/internal/obd"/>
   </ds:schemaRefs>
 </ds:datastoreItem>
+</file>
+
+<file path=customXml/itemProps2.xml><?xml version="1.0" encoding="utf-8"?>
+<ds:datastoreItem xmlns:ds="http://schemas.openxmlformats.org/officeDocument/2006/customXml" ds:itemID="{4DEA9014-ED64-4558-B1E1-D03F0EE32BEB}">
+  <ds:schemaRefs>
+    <ds:schemaRef ds:uri="http://schemas.microsoft.com/office/2006/metadata/properties"/>
+    <ds:schemaRef ds:uri="http://schemas.microsoft.com/office/infopath/2007/PartnerControls"/>
+    <ds:schemaRef ds:uri="71af3243-3dd4-4a8d-8c0d-dd76da1f02a5"/>
+  </ds:schemaRefs>
+</ds:datastoreItem>
+</file>
+
+<file path=customXml/itemProps3.xml><?xml version="1.0" encoding="utf-8"?>
+<ds:datastoreItem xmlns:ds="http://schemas.openxmlformats.org/officeDocument/2006/customXml" ds:itemID="{05D99ABA-76CE-4A8E-B5F0-C051B96628DE}">
+  <ds:schemaRefs>
+    <ds:schemaRef ds:uri="http://schemas.microsoft.com/sharepoint/v3/contenttype/forms"/>
+  </ds:schemaRefs>
+</ds:datastoreItem>
 </file>
--- a/Seasonal_Agriculture_Performance_Presentation.pptx
+++ b/Seasonal_Agriculture_Performance_Presentation.pptx
@@ -13952,16 +13952,20 @@
           </a:p>
           <a:p>
             <a:r>
-              <a:rPr sz="1800" dirty="0"/>
-              <a:t>•  Apply statistical </a:t>
+              <a:rPr sz="1800"/>
+              <a:t>• </a:t>
             </a:r>
             <a:r>
-              <a:rPr lang="en-US" sz="1800" dirty="0"/>
-              <a:t>and e</a:t>
+              <a:rPr lang="en-US" sz="1800"/>
+              <a:t>E</a:t>
+            </a:r>
+            <a:r>
+              <a:rPr lang="en-US"/>
+              <a:t>xtend </a:t>
             </a:r>
             <a:r>
               <a:rPr lang="en-US" dirty="0"/>
-              <a:t>xtend the significance testing (Kruskal-Wallis done here) to a model that controls for crop, irrigation and state together</a:t>
+              <a:t>the significance testing (Kruskal-Wallis done here) to a model that controls for crop, irrigation and state together</a:t>
             </a:r>
             <a:endParaRPr sz="1800" dirty="0"/>
           </a:p>
@@ -28858,6 +28862,24 @@
 </file>
 
 <file path=customXml/item1.xml><?xml version="1.0" encoding="utf-8"?>
+<?mso-contentType ?>
+<FormTemplates xmlns="http://schemas.microsoft.com/sharepoint/v3/contenttype/forms">
+  <Display>DocumentLibraryForm</Display>
+  <Edit>DocumentLibraryForm</Edit>
+  <New>DocumentLibraryForm</New>
+</FormTemplates>
+</file>
+
+<file path=customXml/item2.xml><?xml version="1.0" encoding="utf-8"?>
+<p:properties xmlns:p="http://schemas.microsoft.com/office/2006/metadata/properties" xmlns:xsi="http://www.w3.org/2001/XMLSchema-instance" xmlns:pc="http://schemas.microsoft.com/office/infopath/2007/PartnerControls">
+  <documentManagement>
+    <Status xmlns="71af3243-3dd4-4a8d-8c0d-dd76da1f02a5">Not started</Status>
+    <MediaServiceKeyPoints xmlns="71af3243-3dd4-4a8d-8c0d-dd76da1f02a5" xsi:nil="true"/>
+  </documentManagement>
+</p:properties>
+</file>
+
+<file path=customXml/item3.xml><?xml version="1.0" encoding="utf-8"?>
 <ct:contentTypeSchema xmlns:ct="http://schemas.microsoft.com/office/2006/metadata/contentType" xmlns:ma="http://schemas.microsoft.com/office/2006/metadata/properties/metaAttributes" ct:_="" ma:_="" ma:contentTypeName="Document" ma:contentTypeID="0x01010079F111ED35F8CC479449609E8A0923A6" ma:contentTypeVersion="12" ma:contentTypeDescription="Create a new document." ma:contentTypeScope="" ma:versionID="426e97fa315356fffbdcd9876fe988c2">
   <xsd:schema xmlns:xsd="http://www.w3.org/2001/XMLSchema" xmlns:xs="http://www.w3.org/2001/XMLSchema" xmlns:p="http://schemas.microsoft.com/office/2006/metadata/properties" xmlns:ns2="71af3243-3dd4-4a8d-8c0d-dd76da1f02a5" xmlns:ns3="16c05727-aa75-4e4a-9b5f-8a80a1165891" targetNamespace="http://schemas.microsoft.com/office/2006/metadata/properties" ma:root="true" ma:fieldsID="14b8f0def80e6d70ce3def20c90759ae" ns2:_="" ns3:_="">
     <xsd:import namespace="71af3243-3dd4-4a8d-8c0d-dd76da1f02a5"/>
@@ -29078,25 +29100,25 @@
 </ct:contentTypeSchema>
 </file>
 
-<file path=customXml/item2.xml><?xml version="1.0" encoding="utf-8"?>
-<p:properties xmlns:p="http://schemas.microsoft.com/office/2006/metadata/properties" xmlns:xsi="http://www.w3.org/2001/XMLSchema-instance" xmlns:pc="http://schemas.microsoft.com/office/infopath/2007/PartnerControls">
-  <documentManagement>
-    <Status xmlns="71af3243-3dd4-4a8d-8c0d-dd76da1f02a5">Not started</Status>
-    <MediaServiceKeyPoints xmlns="71af3243-3dd4-4a8d-8c0d-dd76da1f02a5" xsi:nil="true"/>
-  </documentManagement>
-</p:properties>
+<file path=customXml/itemProps1.xml><?xml version="1.0" encoding="utf-8"?>
+<ds:datastoreItem xmlns:ds="http://schemas.openxmlformats.org/officeDocument/2006/customXml" ds:itemID="{05D99ABA-76CE-4A8E-B5F0-C051B96628DE}">
+  <ds:schemaRefs>
+    <ds:schemaRef ds:uri="http://schemas.microsoft.com/sharepoint/v3/contenttype/forms"/>
+  </ds:schemaRefs>
+</ds:datastoreItem>
 </file>
 
-<file path=customXml/item3.xml><?xml version="1.0" encoding="utf-8"?>
-<?mso-contentType ?>
-<FormTemplates xmlns="http://schemas.microsoft.com/sharepoint/v3/contenttype/forms">
-  <Display>DocumentLibraryForm</Display>
-  <Edit>DocumentLibraryForm</Edit>
-  <New>DocumentLibraryForm</New>
-</FormTemplates>
+<file path=customXml/itemProps2.xml><?xml version="1.0" encoding="utf-8"?>
+<ds:datastoreItem xmlns:ds="http://schemas.openxmlformats.org/officeDocument/2006/customXml" ds:itemID="{4DEA9014-ED64-4558-B1E1-D03F0EE32BEB}">
+  <ds:schemaRefs>
+    <ds:schemaRef ds:uri="http://schemas.microsoft.com/office/2006/metadata/properties"/>
+    <ds:schemaRef ds:uri="http://schemas.microsoft.com/office/infopath/2007/PartnerControls"/>
+    <ds:schemaRef ds:uri="71af3243-3dd4-4a8d-8c0d-dd76da1f02a5"/>
+  </ds:schemaRefs>
+</ds:datastoreItem>
 </file>
 
-<file path=customXml/itemProps1.xml><?xml version="1.0" encoding="utf-8"?>
+<file path=customXml/itemProps3.xml><?xml version="1.0" encoding="utf-8"?>
 <ds:datastoreItem xmlns:ds="http://schemas.openxmlformats.org/officeDocument/2006/customXml" ds:itemID="{B19EB750-A6DA-4BE8-B87B-FC499FE73360}">
   <ds:schemaRefs>
     <ds:schemaRef ds:uri="http://schemas.microsoft.com/office/2006/metadata/contentType"/>
@@ -29113,22 +29135,4 @@
     <ds:schemaRef ds:uri="http://schemas.microsoft.com/internal/obd"/>
   </ds:schemaRefs>
 </ds:datastoreItem>
-</file>
-
-<file path=customXml/itemProps2.xml><?xml version="1.0" encoding="utf-8"?>
-<ds:datastoreItem xmlns:ds="http://schemas.openxmlformats.org/officeDocument/2006/customXml" ds:itemID="{4DEA9014-ED64-4558-B1E1-D03F0EE32BEB}">
-  <ds:schemaRefs>
-    <ds:schemaRef ds:uri="http://schemas.microsoft.com/office/2006/metadata/properties"/>
-    <ds:schemaRef ds:uri="http://schemas.microsoft.com/office/infopath/2007/PartnerControls"/>
-    <ds:schemaRef ds:uri="71af3243-3dd4-4a8d-8c0d-dd76da1f02a5"/>
-  </ds:schemaRefs>
-</ds:datastoreItem>
-</file>
-
-<file path=customXml/itemProps3.xml><?xml version="1.0" encoding="utf-8"?>
-<ds:datastoreItem xmlns:ds="http://schemas.openxmlformats.org/officeDocument/2006/customXml" ds:itemID="{05D99ABA-76CE-4A8E-B5F0-C051B96628DE}">
-  <ds:schemaRefs>
-    <ds:schemaRef ds:uri="http://schemas.microsoft.com/sharepoint/v3/contenttype/forms"/>
-  </ds:schemaRefs>
-</ds:datastoreItem>
 </file>